--- a/course-overview.pptx
+++ b/course-overview.pptx
@@ -3205,16 +3205,7 @@
                 </a:solidFill>
                 <a:latin typeface="PingFang SC"/>
               </a:rPr>
-              <a:t>七节课，</a:t>
-            </a:r>
-            <a:r>
-              <a:rPr sz="3400" b="1">
-                <a:solidFill>
-                  <a:srgbClr val="0071E3"/>
-                </a:solidFill>
-                <a:latin typeface="PingFang SC"/>
-              </a:rPr>
-              <a:t>从“哇”到能上线</a:t>
+              <a:t>AI 分享</a:t>
             </a:r>
           </a:p>
         </p:txBody>
